--- a/day2/day2.pptx
+++ b/day2/day2.pptx
@@ -5,7 +5,7 @@
     <p:sldMasterId id="2147483702" r:id="rId1"/>
   </p:sldMasterIdLst>
   <p:notesMasterIdLst>
-    <p:notesMasterId r:id="rId27"/>
+    <p:notesMasterId r:id="rId26"/>
   </p:notesMasterIdLst>
   <p:sldIdLst>
     <p:sldId id="286" r:id="rId2"/>
@@ -27,12 +27,11 @@
     <p:sldId id="275" r:id="rId18"/>
     <p:sldId id="289" r:id="rId19"/>
     <p:sldId id="287" r:id="rId20"/>
-    <p:sldId id="268" r:id="rId21"/>
-    <p:sldId id="269" r:id="rId22"/>
-    <p:sldId id="271" r:id="rId23"/>
-    <p:sldId id="273" r:id="rId24"/>
-    <p:sldId id="290" r:id="rId25"/>
-    <p:sldId id="291" r:id="rId26"/>
+    <p:sldId id="269" r:id="rId21"/>
+    <p:sldId id="271" r:id="rId22"/>
+    <p:sldId id="273" r:id="rId23"/>
+    <p:sldId id="290" r:id="rId24"/>
+    <p:sldId id="291" r:id="rId25"/>
   </p:sldIdLst>
   <p:sldSz cx="10693400" cy="7556500"/>
   <p:notesSz cx="10693400" cy="7556500"/>
@@ -10693,7 +10692,7 @@
           <a:p>
             <a:fld id="{3B2477CB-E0AE-4281-99AD-4E48B34E3FDC}" type="datetimeFigureOut">
               <a:rPr lang="en-IN" smtClean="0"/>
-              <a:t>13-12-2025</a:t>
+              <a:t>25-07-2026</a:t>
             </a:fld>
             <a:endParaRPr lang="en-IN"/>
           </a:p>
@@ -11502,7 +11501,7 @@
           <a:p>
             <a:fld id="{1D8BD707-D9CF-40AE-B4C6-C98DA3205C09}" type="datetimeFigureOut">
               <a:rPr lang="en-US" smtClean="0"/>
-              <a:t>12/13/2025</a:t>
+              <a:t>7/25/2026</a:t>
             </a:fld>
             <a:endParaRPr lang="en-US"/>
           </a:p>
@@ -11826,7 +11825,7 @@
           <a:p>
             <a:fld id="{1D8BD707-D9CF-40AE-B4C6-C98DA3205C09}" type="datetimeFigureOut">
               <a:rPr lang="en-US" smtClean="0"/>
-              <a:t>12/13/2025</a:t>
+              <a:t>7/25/2026</a:t>
             </a:fld>
             <a:endParaRPr lang="en-US"/>
           </a:p>
@@ -12109,7 +12108,7 @@
           <a:p>
             <a:fld id="{1D8BD707-D9CF-40AE-B4C6-C98DA3205C09}" type="datetimeFigureOut">
               <a:rPr lang="en-US" smtClean="0"/>
-              <a:t>12/13/2025</a:t>
+              <a:t>7/25/2026</a:t>
             </a:fld>
             <a:endParaRPr lang="en-US"/>
           </a:p>
@@ -12357,7 +12356,7 @@
           <a:p>
             <a:fld id="{1D8BD707-D9CF-40AE-B4C6-C98DA3205C09}" type="datetimeFigureOut">
               <a:rPr lang="en-US" smtClean="0"/>
-              <a:t>12/13/2025</a:t>
+              <a:t>7/25/2026</a:t>
             </a:fld>
             <a:endParaRPr lang="en-US"/>
           </a:p>
@@ -12696,7 +12695,7 @@
           <a:p>
             <a:fld id="{1D8BD707-D9CF-40AE-B4C6-C98DA3205C09}" type="datetimeFigureOut">
               <a:rPr lang="en-US" smtClean="0"/>
-              <a:t>12/13/2025</a:t>
+              <a:t>7/25/2026</a:t>
             </a:fld>
             <a:endParaRPr lang="en-US"/>
           </a:p>
@@ -13043,7 +13042,7 @@
           <a:p>
             <a:fld id="{1D8BD707-D9CF-40AE-B4C6-C98DA3205C09}" type="datetimeFigureOut">
               <a:rPr lang="en-US" smtClean="0"/>
-              <a:t>12/13/2025</a:t>
+              <a:t>7/25/2026</a:t>
             </a:fld>
             <a:endParaRPr lang="en-US"/>
           </a:p>
@@ -13417,7 +13416,7 @@
           <a:p>
             <a:fld id="{1D8BD707-D9CF-40AE-B4C6-C98DA3205C09}" type="datetimeFigureOut">
               <a:rPr lang="en-US" smtClean="0"/>
-              <a:t>12/13/2025</a:t>
+              <a:t>7/25/2026</a:t>
             </a:fld>
             <a:endParaRPr lang="en-US"/>
           </a:p>
@@ -13887,7 +13886,7 @@
           <a:p>
             <a:fld id="{1D8BD707-D9CF-40AE-B4C6-C98DA3205C09}" type="datetimeFigureOut">
               <a:rPr lang="en-US" smtClean="0"/>
-              <a:t>12/13/2025</a:t>
+              <a:t>7/25/2026</a:t>
             </a:fld>
             <a:endParaRPr lang="en-US"/>
           </a:p>
@@ -14097,7 +14096,7 @@
           <a:p>
             <a:fld id="{1D8BD707-D9CF-40AE-B4C6-C98DA3205C09}" type="datetimeFigureOut">
               <a:rPr lang="en-US" smtClean="0"/>
-              <a:t>12/13/2025</a:t>
+              <a:t>7/25/2026</a:t>
             </a:fld>
             <a:endParaRPr lang="en-US"/>
           </a:p>
@@ -14308,7 +14307,7 @@
           <a:p>
             <a:fld id="{1D8BD707-D9CF-40AE-B4C6-C98DA3205C09}" type="datetimeFigureOut">
               <a:rPr lang="en-US" smtClean="0"/>
-              <a:t>12/13/2025</a:t>
+              <a:t>7/25/2026</a:t>
             </a:fld>
             <a:endParaRPr lang="en-US"/>
           </a:p>
@@ -14540,7 +14539,7 @@
           <a:p>
             <a:fld id="{1D8BD707-D9CF-40AE-B4C6-C98DA3205C09}" type="datetimeFigureOut">
               <a:rPr lang="en-US" smtClean="0"/>
-              <a:t>12/13/2025</a:t>
+              <a:t>7/25/2026</a:t>
             </a:fld>
             <a:endParaRPr lang="en-US"/>
           </a:p>
@@ -14670,7 +14669,7 @@
           <a:p>
             <a:fld id="{1D8BD707-D9CF-40AE-B4C6-C98DA3205C09}" type="datetimeFigureOut">
               <a:rPr lang="en-US" smtClean="0"/>
-              <a:t>12/13/2025</a:t>
+              <a:t>7/25/2026</a:t>
             </a:fld>
             <a:endParaRPr lang="en-US"/>
           </a:p>
@@ -14930,7 +14929,7 @@
           <a:p>
             <a:fld id="{1D8BD707-D9CF-40AE-B4C6-C98DA3205C09}" type="datetimeFigureOut">
               <a:rPr lang="en-US" smtClean="0"/>
-              <a:t>12/13/2025</a:t>
+              <a:t>7/25/2026</a:t>
             </a:fld>
             <a:endParaRPr lang="en-US"/>
           </a:p>
@@ -15233,7 +15232,7 @@
           <a:p>
             <a:fld id="{1D8BD707-D9CF-40AE-B4C6-C98DA3205C09}" type="datetimeFigureOut">
               <a:rPr lang="en-US" smtClean="0"/>
-              <a:t>12/13/2025</a:t>
+              <a:t>7/25/2026</a:t>
             </a:fld>
             <a:endParaRPr lang="en-US"/>
           </a:p>
@@ -15615,7 +15614,7 @@
           <a:p>
             <a:fld id="{1D8BD707-D9CF-40AE-B4C6-C98DA3205C09}" type="datetimeFigureOut">
               <a:rPr lang="en-US" smtClean="0"/>
-              <a:t>12/13/2025</a:t>
+              <a:t>7/25/2026</a:t>
             </a:fld>
             <a:endParaRPr lang="en-US"/>
           </a:p>
@@ -15769,7 +15768,7 @@
           <a:p>
             <a:fld id="{1D8BD707-D9CF-40AE-B4C6-C98DA3205C09}" type="datetimeFigureOut">
               <a:rPr lang="en-US" smtClean="0"/>
-              <a:t>12/13/2025</a:t>
+              <a:t>7/25/2026</a:t>
             </a:fld>
             <a:endParaRPr lang="en-US"/>
           </a:p>
@@ -15896,7 +15895,7 @@
             <a:fld id="{B61BEF0D-F0BB-DE4B-95CE-6DB70DBA9567}" type="datetimeFigureOut">
               <a:rPr lang="en-US" smtClean="0"/>
               <a:pPr/>
-              <a:t>12/13/2025</a:t>
+              <a:t>7/25/2026</a:t>
             </a:fld>
             <a:endParaRPr lang="en-US" dirty="0"/>
           </a:p>
@@ -16212,7 +16211,7 @@
           <a:p>
             <a:fld id="{1D8BD707-D9CF-40AE-B4C6-C98DA3205C09}" type="datetimeFigureOut">
               <a:rPr lang="en-US" smtClean="0"/>
-              <a:t>12/13/2025</a:t>
+              <a:t>7/25/2026</a:t>
             </a:fld>
             <a:endParaRPr lang="en-US"/>
           </a:p>
@@ -16594,7 +16593,7 @@
           <a:p>
             <a:fld id="{1D8BD707-D9CF-40AE-B4C6-C98DA3205C09}" type="datetimeFigureOut">
               <a:rPr lang="en-US" smtClean="0"/>
-              <a:t>12/13/2025</a:t>
+              <a:t>7/25/2026</a:t>
             </a:fld>
             <a:endParaRPr lang="en-US"/>
           </a:p>
@@ -18852,7 +18851,7 @@
           <a:p>
             <a:r>
               <a:rPr dirty="0"/>
-              <a:t>Evaluation of LLM Outputs</a:t>
+              <a:t>Safety &amp; Hallucination Control</a:t>
             </a:r>
           </a:p>
         </p:txBody>
@@ -18870,7 +18869,7 @@
         <p:spPr/>
         <p:txBody>
           <a:bodyPr>
-            <a:normAutofit fontScale="70000" lnSpcReduction="20000"/>
+            <a:normAutofit fontScale="92500" lnSpcReduction="10000"/>
           </a:bodyPr>
           <a:lstStyle/>
           <a:p>
@@ -18879,7 +18878,7 @@
             </a:pPr>
             <a:r>
               <a:rPr dirty="0"/>
-              <a:t>Quality Dimensions:</a:t>
+              <a:t>🚨 Prompts to reduce hallucination:</a:t>
             </a:r>
           </a:p>
           <a:p>
@@ -18888,7 +18887,7 @@
             </a:pPr>
             <a:r>
               <a:rPr dirty="0"/>
-              <a:t>• Relevance</a:t>
+              <a:t>• “If unsure, state ‘I don’t know’.”</a:t>
             </a:r>
           </a:p>
           <a:p>
@@ -18897,7 +18896,7 @@
             </a:pPr>
             <a:r>
               <a:rPr dirty="0"/>
-              <a:t>• Accuracy</a:t>
+              <a:t>• “Cite sources from given context only.”</a:t>
             </a:r>
           </a:p>
           <a:p>
@@ -18906,25 +18905,7 @@
             </a:pPr>
             <a:r>
               <a:rPr dirty="0"/>
-              <a:t>• Consistency</a:t>
-            </a:r>
-          </a:p>
-          <a:p>
-            <a:pPr>
-              <a:defRPr sz="2200"/>
-            </a:pPr>
-            <a:r>
-              <a:rPr dirty="0"/>
-              <a:t>• Style/Tone</a:t>
-            </a:r>
-          </a:p>
-          <a:p>
-            <a:pPr>
-              <a:defRPr sz="2200"/>
-            </a:pPr>
-            <a:r>
-              <a:rPr dirty="0"/>
-              <a:t>• Safety</a:t>
+              <a:t>• “Verify your answer before responding.”</a:t>
             </a:r>
           </a:p>
           <a:p>
@@ -18939,7 +18920,7 @@
             </a:pPr>
             <a:r>
               <a:rPr dirty="0"/>
-              <a:t>Methods:</a:t>
+              <a:t>Best Practices:</a:t>
             </a:r>
           </a:p>
           <a:p>
@@ -18948,7 +18929,7 @@
             </a:pPr>
             <a:r>
               <a:rPr dirty="0"/>
-              <a:t>• Human evaluation</a:t>
+              <a:t>• Use retrieval (RAG)</a:t>
             </a:r>
           </a:p>
           <a:p>
@@ -18957,7 +18938,7 @@
             </a:pPr>
             <a:r>
               <a:rPr dirty="0"/>
-              <a:t>• A/B testing</a:t>
+              <a:t>• Add validation rules</a:t>
             </a:r>
           </a:p>
           <a:p>
@@ -18966,16 +18947,7 @@
             </a:pPr>
             <a:r>
               <a:rPr dirty="0"/>
-              <a:t>• Reference-based metrics (ROUGE, BLEU)</a:t>
-            </a:r>
-          </a:p>
-          <a:p>
-            <a:pPr>
-              <a:defRPr sz="2200"/>
-            </a:pPr>
-            <a:r>
-              <a:rPr dirty="0"/>
-              <a:t>• Model-based evaluators (LLM-as-a-judge)</a:t>
+              <a:t>• Avoid open-ended generative prompts for factual tasks</a:t>
             </a:r>
           </a:p>
         </p:txBody>
@@ -19017,12 +18989,14 @@
         </p:nvSpPr>
         <p:spPr/>
         <p:txBody>
-          <a:bodyPr/>
+          <a:bodyPr>
+            <a:normAutofit/>
+          </a:bodyPr>
           <a:lstStyle/>
           <a:p>
             <a:r>
               <a:rPr dirty="0"/>
-              <a:t>Safety &amp; Hallucination Control</a:t>
+              <a:t>RAG (Retrieval-Augmented Generation) — Introduction</a:t>
             </a:r>
           </a:p>
         </p:txBody>
@@ -19040,7 +19014,7 @@
         <p:spPr/>
         <p:txBody>
           <a:bodyPr>
-            <a:normAutofit fontScale="92500" lnSpcReduction="10000"/>
+            <a:normAutofit fontScale="77500" lnSpcReduction="20000"/>
           </a:bodyPr>
           <a:lstStyle/>
           <a:p>
@@ -19049,7 +19023,7 @@
             </a:pPr>
             <a:r>
               <a:rPr dirty="0"/>
-              <a:t>🚨 Prompts to reduce hallucination:</a:t>
+              <a:t>Pipeline:</a:t>
             </a:r>
           </a:p>
           <a:p>
@@ -19058,7 +19032,7 @@
             </a:pPr>
             <a:r>
               <a:rPr dirty="0"/>
-              <a:t>• “If unsure, state ‘I don’t know’.”</a:t>
+              <a:t>1. User Query</a:t>
             </a:r>
           </a:p>
           <a:p>
@@ -19067,7 +19041,7 @@
             </a:pPr>
             <a:r>
               <a:rPr dirty="0"/>
-              <a:t>• “Cite sources from given context only.”</a:t>
+              <a:t>2. Embed query</a:t>
             </a:r>
           </a:p>
           <a:p>
@@ -19076,7 +19050,25 @@
             </a:pPr>
             <a:r>
               <a:rPr dirty="0"/>
-              <a:t>• “Verify your answer before responding.”</a:t>
+              <a:t>3. Retrieve most relevant documents</a:t>
+            </a:r>
+          </a:p>
+          <a:p>
+            <a:pPr>
+              <a:defRPr sz="2200"/>
+            </a:pPr>
+            <a:r>
+              <a:rPr dirty="0"/>
+              <a:t>4. Construct context</a:t>
+            </a:r>
+          </a:p>
+          <a:p>
+            <a:pPr>
+              <a:defRPr sz="2200"/>
+            </a:pPr>
+            <a:r>
+              <a:rPr dirty="0"/>
+              <a:t>5. LLM generates grounded answer</a:t>
             </a:r>
           </a:p>
           <a:p>
@@ -19091,7 +19083,7 @@
             </a:pPr>
             <a:r>
               <a:rPr dirty="0"/>
-              <a:t>Best Practices:</a:t>
+              <a:t>Benefits:</a:t>
             </a:r>
           </a:p>
           <a:p>
@@ -19100,7 +19092,7 @@
             </a:pPr>
             <a:r>
               <a:rPr dirty="0"/>
-              <a:t>• Use retrieval (RAG)</a:t>
+              <a:t>• Lower hallucinations</a:t>
             </a:r>
           </a:p>
           <a:p>
@@ -19109,7 +19101,7 @@
             </a:pPr>
             <a:r>
               <a:rPr dirty="0"/>
-              <a:t>• Add validation rules</a:t>
+              <a:t>• Domain-specific accuracy</a:t>
             </a:r>
           </a:p>
           <a:p>
@@ -19118,7 +19110,7 @@
             </a:pPr>
             <a:r>
               <a:rPr dirty="0"/>
-              <a:t>• Avoid open-ended generative prompts for factual tasks</a:t>
+              <a:t>• Updatable knowledge</a:t>
             </a:r>
           </a:p>
         </p:txBody>
@@ -19160,169 +19152,6 @@
         </p:nvSpPr>
         <p:spPr/>
         <p:txBody>
-          <a:bodyPr>
-            <a:normAutofit/>
-          </a:bodyPr>
-          <a:lstStyle/>
-          <a:p>
-            <a:r>
-              <a:rPr dirty="0"/>
-              <a:t>RAG (Retrieval-Augmented Generation) — Introduction</a:t>
-            </a:r>
-          </a:p>
-        </p:txBody>
-      </p:sp>
-      <p:sp>
-        <p:nvSpPr>
-          <p:cNvPr id="3" name="Content Placeholder 2"/>
-          <p:cNvSpPr>
-            <a:spLocks noGrp="1"/>
-          </p:cNvSpPr>
-          <p:nvPr>
-            <p:ph idx="1"/>
-          </p:nvPr>
-        </p:nvSpPr>
-        <p:spPr/>
-        <p:txBody>
-          <a:bodyPr>
-            <a:normAutofit fontScale="77500" lnSpcReduction="20000"/>
-          </a:bodyPr>
-          <a:lstStyle/>
-          <a:p>
-            <a:pPr>
-              <a:defRPr sz="2200"/>
-            </a:pPr>
-            <a:r>
-              <a:rPr dirty="0"/>
-              <a:t>Pipeline:</a:t>
-            </a:r>
-          </a:p>
-          <a:p>
-            <a:pPr>
-              <a:defRPr sz="2200"/>
-            </a:pPr>
-            <a:r>
-              <a:rPr dirty="0"/>
-              <a:t>1. User Query</a:t>
-            </a:r>
-          </a:p>
-          <a:p>
-            <a:pPr>
-              <a:defRPr sz="2200"/>
-            </a:pPr>
-            <a:r>
-              <a:rPr dirty="0"/>
-              <a:t>2. Embed query</a:t>
-            </a:r>
-          </a:p>
-          <a:p>
-            <a:pPr>
-              <a:defRPr sz="2200"/>
-            </a:pPr>
-            <a:r>
-              <a:rPr dirty="0"/>
-              <a:t>3. Retrieve most relevant documents</a:t>
-            </a:r>
-          </a:p>
-          <a:p>
-            <a:pPr>
-              <a:defRPr sz="2200"/>
-            </a:pPr>
-            <a:r>
-              <a:rPr dirty="0"/>
-              <a:t>4. Construct context</a:t>
-            </a:r>
-          </a:p>
-          <a:p>
-            <a:pPr>
-              <a:defRPr sz="2200"/>
-            </a:pPr>
-            <a:r>
-              <a:rPr dirty="0"/>
-              <a:t>5. LLM generates grounded answer</a:t>
-            </a:r>
-          </a:p>
-          <a:p>
-            <a:pPr>
-              <a:defRPr sz="2200"/>
-            </a:pPr>
-            <a:endParaRPr dirty="0"/>
-          </a:p>
-          <a:p>
-            <a:pPr>
-              <a:defRPr sz="2200"/>
-            </a:pPr>
-            <a:r>
-              <a:rPr dirty="0"/>
-              <a:t>Benefits:</a:t>
-            </a:r>
-          </a:p>
-          <a:p>
-            <a:pPr>
-              <a:defRPr sz="2200"/>
-            </a:pPr>
-            <a:r>
-              <a:rPr dirty="0"/>
-              <a:t>• Lower hallucinations</a:t>
-            </a:r>
-          </a:p>
-          <a:p>
-            <a:pPr>
-              <a:defRPr sz="2200"/>
-            </a:pPr>
-            <a:r>
-              <a:rPr dirty="0"/>
-              <a:t>• Domain-specific accuracy</a:t>
-            </a:r>
-          </a:p>
-          <a:p>
-            <a:pPr>
-              <a:defRPr sz="2200"/>
-            </a:pPr>
-            <a:r>
-              <a:rPr dirty="0"/>
-              <a:t>• Updatable knowledge</a:t>
-            </a:r>
-          </a:p>
-        </p:txBody>
-      </p:sp>
-    </p:spTree>
-  </p:cSld>
-  <p:clrMapOvr>
-    <a:masterClrMapping/>
-  </p:clrMapOvr>
-</p:sld>
-</file>
-
-<file path=ppt/slides/slide23.xml><?xml version="1.0" encoding="utf-8"?>
-<p:sld xmlns:a="http://schemas.openxmlformats.org/drawingml/2006/main" xmlns:r="http://schemas.openxmlformats.org/officeDocument/2006/relationships" xmlns:p="http://schemas.openxmlformats.org/presentationml/2006/main">
-  <p:cSld>
-    <p:spTree>
-      <p:nvGrpSpPr>
-        <p:cNvPr id="1" name=""/>
-        <p:cNvGrpSpPr/>
-        <p:nvPr/>
-      </p:nvGrpSpPr>
-      <p:grpSpPr>
-        <a:xfrm>
-          <a:off x="0" y="0"/>
-          <a:ext cx="0" cy="0"/>
-          <a:chOff x="0" y="0"/>
-          <a:chExt cx="0" cy="0"/>
-        </a:xfrm>
-      </p:grpSpPr>
-      <p:sp>
-        <p:nvSpPr>
-          <p:cNvPr id="2" name="Title 1"/>
-          <p:cNvSpPr>
-            <a:spLocks noGrp="1"/>
-          </p:cNvSpPr>
-          <p:nvPr>
-            <p:ph type="title"/>
-          </p:nvPr>
-        </p:nvSpPr>
-        <p:spPr/>
-        <p:txBody>
           <a:bodyPr/>
           <a:lstStyle/>
           <a:p>
@@ -19410,7 +19239,7 @@
 </p:sld>
 </file>
 
-<file path=ppt/slides/slide24.xml><?xml version="1.0" encoding="utf-8"?>
+<file path=ppt/slides/slide23.xml><?xml version="1.0" encoding="utf-8"?>
 <p:sld xmlns:a="http://schemas.openxmlformats.org/drawingml/2006/main" xmlns:r="http://schemas.openxmlformats.org/officeDocument/2006/relationships" xmlns:p="http://schemas.openxmlformats.org/presentationml/2006/main">
   <p:cSld>
     <p:spTree>
@@ -19592,7 +19421,7 @@
 </p:sld>
 </file>
 
-<file path=ppt/slides/slide25.xml><?xml version="1.0" encoding="utf-8"?>
+<file path=ppt/slides/slide24.xml><?xml version="1.0" encoding="utf-8"?>
 <p:sld xmlns:a="http://schemas.openxmlformats.org/drawingml/2006/main" xmlns:r="http://schemas.openxmlformats.org/officeDocument/2006/relationships" xmlns:p="http://schemas.openxmlformats.org/presentationml/2006/main">
   <p:cSld>
     <p:spTree>
